--- a/ゲーム科1年/00_前期/ゲームプログラミングⅢ/ゲーム数学/座学/15_極座標とデカルト座標.pptx
+++ b/ゲーム科1年/00_前期/ゲームプログラミングⅢ/ゲーム数学/座学/15_極座標とデカルト座標.pptx
@@ -263,7 +263,7 @@
           <a:p>
             <a:fld id="{E9CC885B-4903-4D54-9A93-00025F12DED9}" type="datetimeFigureOut">
               <a:rPr kumimoji="1" lang="ja-JP" altLang="en-US" smtClean="0"/>
-              <a:t>2024/10/11</a:t>
+              <a:t>2025/6/26</a:t>
             </a:fld>
             <a:endParaRPr kumimoji="1" lang="ja-JP" altLang="en-US"/>
           </a:p>
@@ -493,7 +493,7 @@
           <a:p>
             <a:fld id="{E9CC885B-4903-4D54-9A93-00025F12DED9}" type="datetimeFigureOut">
               <a:rPr kumimoji="1" lang="ja-JP" altLang="en-US" smtClean="0"/>
-              <a:t>2024/10/11</a:t>
+              <a:t>2025/6/26</a:t>
             </a:fld>
             <a:endParaRPr kumimoji="1" lang="ja-JP" altLang="en-US"/>
           </a:p>
@@ -733,7 +733,7 @@
           <a:p>
             <a:fld id="{E9CC885B-4903-4D54-9A93-00025F12DED9}" type="datetimeFigureOut">
               <a:rPr kumimoji="1" lang="ja-JP" altLang="en-US" smtClean="0"/>
-              <a:t>2024/10/11</a:t>
+              <a:t>2025/6/26</a:t>
             </a:fld>
             <a:endParaRPr kumimoji="1" lang="ja-JP" altLang="en-US"/>
           </a:p>
@@ -963,7 +963,7 @@
           <a:p>
             <a:fld id="{E9CC885B-4903-4D54-9A93-00025F12DED9}" type="datetimeFigureOut">
               <a:rPr kumimoji="1" lang="ja-JP" altLang="en-US" smtClean="0"/>
-              <a:t>2024/10/11</a:t>
+              <a:t>2025/6/26</a:t>
             </a:fld>
             <a:endParaRPr kumimoji="1" lang="ja-JP" altLang="en-US"/>
           </a:p>
@@ -1238,7 +1238,7 @@
           <a:p>
             <a:fld id="{E9CC885B-4903-4D54-9A93-00025F12DED9}" type="datetimeFigureOut">
               <a:rPr kumimoji="1" lang="ja-JP" altLang="en-US" smtClean="0"/>
-              <a:t>2024/10/11</a:t>
+              <a:t>2025/6/26</a:t>
             </a:fld>
             <a:endParaRPr kumimoji="1" lang="ja-JP" altLang="en-US"/>
           </a:p>
@@ -1567,7 +1567,7 @@
           <a:p>
             <a:fld id="{E9CC885B-4903-4D54-9A93-00025F12DED9}" type="datetimeFigureOut">
               <a:rPr kumimoji="1" lang="ja-JP" altLang="en-US" smtClean="0"/>
-              <a:t>2024/10/11</a:t>
+              <a:t>2025/6/26</a:t>
             </a:fld>
             <a:endParaRPr kumimoji="1" lang="ja-JP" altLang="en-US"/>
           </a:p>
@@ -2043,7 +2043,7 @@
           <a:p>
             <a:fld id="{E9CC885B-4903-4D54-9A93-00025F12DED9}" type="datetimeFigureOut">
               <a:rPr kumimoji="1" lang="ja-JP" altLang="en-US" smtClean="0"/>
-              <a:t>2024/10/11</a:t>
+              <a:t>2025/6/26</a:t>
             </a:fld>
             <a:endParaRPr kumimoji="1" lang="ja-JP" altLang="en-US"/>
           </a:p>
@@ -2184,7 +2184,7 @@
           <a:p>
             <a:fld id="{E9CC885B-4903-4D54-9A93-00025F12DED9}" type="datetimeFigureOut">
               <a:rPr kumimoji="1" lang="ja-JP" altLang="en-US" smtClean="0"/>
-              <a:t>2024/10/11</a:t>
+              <a:t>2025/6/26</a:t>
             </a:fld>
             <a:endParaRPr kumimoji="1" lang="ja-JP" altLang="en-US"/>
           </a:p>
@@ -2297,7 +2297,7 @@
           <a:p>
             <a:fld id="{E9CC885B-4903-4D54-9A93-00025F12DED9}" type="datetimeFigureOut">
               <a:rPr kumimoji="1" lang="ja-JP" altLang="en-US" smtClean="0"/>
-              <a:t>2024/10/11</a:t>
+              <a:t>2025/6/26</a:t>
             </a:fld>
             <a:endParaRPr kumimoji="1" lang="ja-JP" altLang="en-US"/>
           </a:p>
@@ -2640,7 +2640,7 @@
           <a:p>
             <a:fld id="{E9CC885B-4903-4D54-9A93-00025F12DED9}" type="datetimeFigureOut">
               <a:rPr kumimoji="1" lang="ja-JP" altLang="en-US" smtClean="0"/>
-              <a:t>2024/10/11</a:t>
+              <a:t>2025/6/26</a:t>
             </a:fld>
             <a:endParaRPr kumimoji="1" lang="ja-JP" altLang="en-US"/>
           </a:p>
@@ -2928,7 +2928,7 @@
           <a:p>
             <a:fld id="{E9CC885B-4903-4D54-9A93-00025F12DED9}" type="datetimeFigureOut">
               <a:rPr kumimoji="1" lang="ja-JP" altLang="en-US" smtClean="0"/>
-              <a:t>2024/10/11</a:t>
+              <a:t>2025/6/26</a:t>
             </a:fld>
             <a:endParaRPr kumimoji="1" lang="ja-JP" altLang="en-US"/>
           </a:p>
@@ -3201,7 +3201,7 @@
           <a:p>
             <a:fld id="{E9CC885B-4903-4D54-9A93-00025F12DED9}" type="datetimeFigureOut">
               <a:rPr kumimoji="1" lang="ja-JP" altLang="en-US" smtClean="0"/>
-              <a:t>2024/10/11</a:t>
+              <a:t>2025/6/26</a:t>
             </a:fld>
             <a:endParaRPr kumimoji="1" lang="ja-JP" altLang="en-US"/>
           </a:p>
@@ -3618,6 +3618,60 @@
           <a:chExt cx="0" cy="0"/>
         </a:xfrm>
       </p:grpSpPr>
+      <p:sp>
+        <p:nvSpPr>
+          <p:cNvPr id="2" name="四角形: 角を丸くする 1">
+            <a:extLst>
+              <a:ext uri="{FF2B5EF4-FFF2-40B4-BE49-F238E27FC236}">
+                <a16:creationId xmlns:a16="http://schemas.microsoft.com/office/drawing/2014/main" id="{05DEFC04-B5DC-451A-BAF0-40B9DC790032}"/>
+              </a:ext>
+            </a:extLst>
+          </p:cNvPr>
+          <p:cNvSpPr/>
+          <p:nvPr/>
+        </p:nvSpPr>
+        <p:spPr>
+          <a:xfrm>
+            <a:off x="330201" y="1837267"/>
+            <a:ext cx="4724400" cy="4528779"/>
+          </a:xfrm>
+          <a:prstGeom prst="roundRect">
+            <a:avLst/>
+          </a:prstGeom>
+          <a:solidFill>
+            <a:schemeClr val="bg1">
+              <a:lumMod val="85000"/>
+            </a:schemeClr>
+          </a:solidFill>
+          <a:ln>
+            <a:noFill/>
+          </a:ln>
+        </p:spPr>
+        <p:style>
+          <a:lnRef idx="2">
+            <a:schemeClr val="accent1">
+              <a:shade val="50000"/>
+            </a:schemeClr>
+          </a:lnRef>
+          <a:fillRef idx="1">
+            <a:schemeClr val="accent1"/>
+          </a:fillRef>
+          <a:effectRef idx="0">
+            <a:schemeClr val="accent1"/>
+          </a:effectRef>
+          <a:fontRef idx="minor">
+            <a:schemeClr val="lt1"/>
+          </a:fontRef>
+        </p:style>
+        <p:txBody>
+          <a:bodyPr rtlCol="0" anchor="ctr"/>
+          <a:lstStyle/>
+          <a:p>
+            <a:pPr algn="ctr"/>
+            <a:endParaRPr kumimoji="1" lang="ja-JP" altLang="en-US"/>
+          </a:p>
+        </p:txBody>
+      </p:sp>
       <p:sp>
         <p:nvSpPr>
           <p:cNvPr id="4" name="テキスト ボックス 3">
@@ -4300,6 +4354,60 @@
           <a:chExt cx="0" cy="0"/>
         </a:xfrm>
       </p:grpSpPr>
+      <p:sp>
+        <p:nvSpPr>
+          <p:cNvPr id="30" name="四角形: 角を丸くする 29">
+            <a:extLst>
+              <a:ext uri="{FF2B5EF4-FFF2-40B4-BE49-F238E27FC236}">
+                <a16:creationId xmlns:a16="http://schemas.microsoft.com/office/drawing/2014/main" id="{E8DB68C5-431B-4749-AB09-0DCC60B86851}"/>
+              </a:ext>
+            </a:extLst>
+          </p:cNvPr>
+          <p:cNvSpPr/>
+          <p:nvPr/>
+        </p:nvSpPr>
+        <p:spPr>
+          <a:xfrm>
+            <a:off x="330201" y="1678095"/>
+            <a:ext cx="7958666" cy="4687952"/>
+          </a:xfrm>
+          <a:prstGeom prst="roundRect">
+            <a:avLst/>
+          </a:prstGeom>
+          <a:solidFill>
+            <a:schemeClr val="bg1">
+              <a:lumMod val="85000"/>
+            </a:schemeClr>
+          </a:solidFill>
+          <a:ln>
+            <a:noFill/>
+          </a:ln>
+        </p:spPr>
+        <p:style>
+          <a:lnRef idx="2">
+            <a:schemeClr val="accent1">
+              <a:shade val="50000"/>
+            </a:schemeClr>
+          </a:lnRef>
+          <a:fillRef idx="1">
+            <a:schemeClr val="accent1"/>
+          </a:fillRef>
+          <a:effectRef idx="0">
+            <a:schemeClr val="accent1"/>
+          </a:effectRef>
+          <a:fontRef idx="minor">
+            <a:schemeClr val="lt1"/>
+          </a:fontRef>
+        </p:style>
+        <p:txBody>
+          <a:bodyPr rtlCol="0" anchor="ctr"/>
+          <a:lstStyle/>
+          <a:p>
+            <a:pPr algn="ctr"/>
+            <a:endParaRPr kumimoji="1" lang="ja-JP" altLang="en-US"/>
+          </a:p>
+        </p:txBody>
+      </p:sp>
       <p:sp>
         <p:nvSpPr>
           <p:cNvPr id="4" name="テキスト ボックス 3">
@@ -6839,8 +6947,8 @@
           </a:p>
         </p:txBody>
       </p:sp>
-      <mc:AlternateContent xmlns:mc="http://schemas.openxmlformats.org/markup-compatibility/2006">
-        <mc:Choice xmlns:a14="http://schemas.microsoft.com/office/drawing/2010/main" Requires="a14">
+      <mc:AlternateContent xmlns:mc="http://schemas.openxmlformats.org/markup-compatibility/2006" xmlns:a14="http://schemas.microsoft.com/office/drawing/2010/main">
+        <mc:Choice Requires="a14">
           <p:sp>
             <p:nvSpPr>
               <p:cNvPr id="6" name="テキスト ボックス 5">
@@ -7159,7 +7267,7 @@
             </p:txBody>
           </p:sp>
         </mc:Choice>
-        <mc:Fallback>
+        <mc:Fallback xmlns="">
           <p:sp>
             <p:nvSpPr>
               <p:cNvPr id="6" name="テキスト ボックス 5">
@@ -7270,8 +7378,8 @@
           </a:p>
         </p:txBody>
       </p:sp>
-      <mc:AlternateContent xmlns:mc="http://schemas.openxmlformats.org/markup-compatibility/2006">
-        <mc:Choice xmlns:a14="http://schemas.microsoft.com/office/drawing/2010/main" Requires="a14">
+      <mc:AlternateContent xmlns:mc="http://schemas.openxmlformats.org/markup-compatibility/2006" xmlns:a14="http://schemas.microsoft.com/office/drawing/2010/main">
+        <mc:Choice Requires="a14">
           <p:sp>
             <p:nvSpPr>
               <p:cNvPr id="6" name="テキスト ボックス 5">
@@ -7370,19 +7478,7 @@
                       <a:rPr lang="en-US" altLang="ja-JP" sz="2400" b="0" i="1" smtClean="0">
                         <a:latin typeface="Cambria Math" panose="02040503050406030204" pitchFamily="18" charset="0"/>
                       </a:rPr>
-                      <m:t>=200@</m:t>
-                    </m:r>
-                    <m:r>
-                      <a:rPr lang="en-US" altLang="ja-JP" sz="2400" b="0" i="1" smtClean="0">
-                        <a:latin typeface="Cambria Math" panose="02040503050406030204" pitchFamily="18" charset="0"/>
-                      </a:rPr>
-                      <m:t>60</m:t>
-                    </m:r>
-                    <m:r>
-                      <a:rPr lang="en-US" altLang="ja-JP" sz="2400" b="0" i="1" smtClean="0">
-                        <a:latin typeface="Cambria Math" panose="02040503050406030204" pitchFamily="18" charset="0"/>
-                      </a:rPr>
-                      <m:t>°</m:t>
+                      <m:t>=200@60°</m:t>
                     </m:r>
                   </m:oMath>
                 </a14:m>
@@ -7391,7 +7487,7 @@
             </p:txBody>
           </p:sp>
         </mc:Choice>
-        <mc:Fallback>
+        <mc:Fallback xmlns="">
           <p:sp>
             <p:nvSpPr>
               <p:cNvPr id="6" name="テキスト ボックス 5">
